--- a/activity/M04A00/M04A00.pptx
+++ b/activity/M04A00/M04A00.pptx
@@ -140,61 +140,6 @@
 
 <file path=ppt/changesInfos/changesInfo1.xml><?xml version="1.0" encoding="utf-8"?>
 <pc:chgInfo xmlns:a="http://schemas.openxmlformats.org/drawingml/2006/main" xmlns:r="http://schemas.openxmlformats.org/officeDocument/2006/relationships" xmlns:ac="http://schemas.microsoft.com/office/drawing/2013/main/command" xmlns:pc="http://schemas.microsoft.com/office/powerpoint/2013/main/command">
-  <pc:docChgLst>
-    <pc:chgData name="WILLIAM RICARDO AGUILAR PIÑA" userId="25538c52-b196-49fc-9025-2dd86a54f18a" providerId="ADAL" clId="{7B02A175-094B-4BC9-A820-041D15B153AC}"/>
-    <pc:docChg chg="undo custSel addSld modSld">
-      <pc:chgData name="WILLIAM RICARDO AGUILAR PIÑA" userId="25538c52-b196-49fc-9025-2dd86a54f18a" providerId="ADAL" clId="{7B02A175-094B-4BC9-A820-041D15B153AC}" dt="2018-10-12T14:37:21.796" v="341" actId="1076"/>
-      <pc:docMkLst>
-        <pc:docMk/>
-      </pc:docMkLst>
-      <pc:sldChg chg="modSp">
-        <pc:chgData name="WILLIAM RICARDO AGUILAR PIÑA" userId="25538c52-b196-49fc-9025-2dd86a54f18a" providerId="ADAL" clId="{7B02A175-094B-4BC9-A820-041D15B153AC}" dt="2018-10-12T13:17:31.962" v="128"/>
-        <pc:sldMkLst>
-          <pc:docMk/>
-          <pc:sldMk cId="0" sldId="256"/>
-        </pc:sldMkLst>
-        <pc:spChg chg="mod">
-          <ac:chgData name="WILLIAM RICARDO AGUILAR PIÑA" userId="25538c52-b196-49fc-9025-2dd86a54f18a" providerId="ADAL" clId="{7B02A175-094B-4BC9-A820-041D15B153AC}" dt="2018-10-12T13:08:21.790" v="4" actId="255"/>
-          <ac:spMkLst>
-            <pc:docMk/>
-            <pc:sldMk cId="0" sldId="256"/>
-            <ac:spMk id="8" creationId="{00000000-0000-0000-0000-000000000000}"/>
-          </ac:spMkLst>
-        </pc:spChg>
-        <pc:spChg chg="mod">
-          <ac:chgData name="WILLIAM RICARDO AGUILAR PIÑA" userId="25538c52-b196-49fc-9025-2dd86a54f18a" providerId="ADAL" clId="{7B02A175-094B-4BC9-A820-041D15B153AC}" dt="2018-10-12T13:17:31.962" v="128"/>
-          <ac:spMkLst>
-            <pc:docMk/>
-            <pc:sldMk cId="0" sldId="256"/>
-            <ac:spMk id="9" creationId="{ACC46523-F69E-4664-A425-9648BC1F23B9}"/>
-          </ac:spMkLst>
-        </pc:spChg>
-      </pc:sldChg>
-      <pc:sldChg chg="addSp delSp">
-        <pc:chgData name="WILLIAM RICARDO AGUILAR PIÑA" userId="25538c52-b196-49fc-9025-2dd86a54f18a" providerId="ADAL" clId="{7B02A175-094B-4BC9-A820-041D15B153AC}" dt="2018-10-12T13:18:49.208" v="160"/>
-        <pc:sldMkLst>
-          <pc:docMk/>
-          <pc:sldMk cId="655422725" sldId="298"/>
-        </pc:sldMkLst>
-        <pc:spChg chg="del">
-          <ac:chgData name="WILLIAM RICARDO AGUILAR PIÑA" userId="25538c52-b196-49fc-9025-2dd86a54f18a" providerId="ADAL" clId="{7B02A175-094B-4BC9-A820-041D15B153AC}" dt="2018-10-12T13:18:48.893" v="159" actId="478"/>
-          <ac:spMkLst>
-            <pc:docMk/>
-            <pc:sldMk cId="655422725" sldId="298"/>
-            <ac:spMk id="10" creationId="{D6785755-1437-4D5A-9C94-373277D1F6A1}"/>
-          </ac:spMkLst>
-        </pc:spChg>
-        <pc:spChg chg="add">
-          <ac:chgData name="WILLIAM RICARDO AGUILAR PIÑA" userId="25538c52-b196-49fc-9025-2dd86a54f18a" providerId="ADAL" clId="{7B02A175-094B-4BC9-A820-041D15B153AC}" dt="2018-10-12T13:18:49.208" v="160"/>
-          <ac:spMkLst>
-            <pc:docMk/>
-            <pc:sldMk cId="655422725" sldId="298"/>
-            <ac:spMk id="11" creationId="{70E63F43-478C-4856-B85E-52B2BF27D230}"/>
-          </ac:spMkLst>
-        </pc:spChg>
-      </pc:sldChg>
-    </pc:docChg>
-  </pc:docChgLst>
   <pc:docChgLst>
     <pc:chgData name="WILLIAM RICARDO AGUILAR PIÑA" userId="25538c52-b196-49fc-9025-2dd86a54f18a" providerId="ADAL" clId="{E9B832C8-6A53-48D6-827D-3087648C1424}"/>
     <pc:docChg chg="undo custSel addSld delSld modSld sldOrd">
@@ -868,30 +813,6 @@
     </pc:docChg>
   </pc:docChgLst>
   <pc:docChgLst>
-    <pc:chgData name="WILLIAM RICARDO AGUILAR PIÑA" userId="25538c52-b196-49fc-9025-2dd86a54f18a" providerId="ADAL" clId="{DEE8EAB7-5FD5-474F-AAC5-FFF1299E04F4}"/>
-    <pc:docChg chg="modSld">
-      <pc:chgData name="WILLIAM RICARDO AGUILAR PIÑA" userId="25538c52-b196-49fc-9025-2dd86a54f18a" providerId="ADAL" clId="{DEE8EAB7-5FD5-474F-AAC5-FFF1299E04F4}" dt="2023-12-01T12:53:07.457" v="1" actId="20577"/>
-      <pc:docMkLst>
-        <pc:docMk/>
-      </pc:docMkLst>
-      <pc:sldChg chg="modSp mod">
-        <pc:chgData name="WILLIAM RICARDO AGUILAR PIÑA" userId="25538c52-b196-49fc-9025-2dd86a54f18a" providerId="ADAL" clId="{DEE8EAB7-5FD5-474F-AAC5-FFF1299E04F4}" dt="2023-12-01T12:53:07.457" v="1" actId="20577"/>
-        <pc:sldMkLst>
-          <pc:docMk/>
-          <pc:sldMk cId="3053183585" sldId="353"/>
-        </pc:sldMkLst>
-        <pc:spChg chg="mod">
-          <ac:chgData name="WILLIAM RICARDO AGUILAR PIÑA" userId="25538c52-b196-49fc-9025-2dd86a54f18a" providerId="ADAL" clId="{DEE8EAB7-5FD5-474F-AAC5-FFF1299E04F4}" dt="2023-12-01T12:53:07.457" v="1" actId="20577"/>
-          <ac:spMkLst>
-            <pc:docMk/>
-            <pc:sldMk cId="3053183585" sldId="353"/>
-            <ac:spMk id="8" creationId="{00000000-0000-0000-0000-000000000000}"/>
-          </ac:spMkLst>
-        </pc:spChg>
-      </pc:sldChg>
-    </pc:docChg>
-  </pc:docChgLst>
-  <pc:docChgLst>
     <pc:chgData name="WILLIAM RICARDO AGUILAR PIÑA" userId="25538c52-b196-49fc-9025-2dd86a54f18a" providerId="ADAL" clId="{F17B431F-F149-468B-AAEE-F0B8EA094F38}"/>
     <pc:docChg chg="undo custSel addSld delSld modSld sldOrd">
       <pc:chgData name="WILLIAM RICARDO AGUILAR PIÑA" userId="25538c52-b196-49fc-9025-2dd86a54f18a" providerId="ADAL" clId="{F17B431F-F149-468B-AAEE-F0B8EA094F38}" dt="2018-09-10T20:49:33.928" v="190" actId="207"/>
@@ -923,6 +844,85 @@
       </pc:sldChg>
     </pc:docChg>
   </pc:docChgLst>
+  <pc:docChgLst>
+    <pc:chgData name="WILLIAM RICARDO AGUILAR PIÑA" userId="25538c52-b196-49fc-9025-2dd86a54f18a" providerId="ADAL" clId="{7B02A175-094B-4BC9-A820-041D15B153AC}"/>
+    <pc:docChg chg="undo custSel addSld modSld">
+      <pc:chgData name="WILLIAM RICARDO AGUILAR PIÑA" userId="25538c52-b196-49fc-9025-2dd86a54f18a" providerId="ADAL" clId="{7B02A175-094B-4BC9-A820-041D15B153AC}" dt="2018-10-12T14:37:21.796" v="341" actId="1076"/>
+      <pc:docMkLst>
+        <pc:docMk/>
+      </pc:docMkLst>
+      <pc:sldChg chg="modSp">
+        <pc:chgData name="WILLIAM RICARDO AGUILAR PIÑA" userId="25538c52-b196-49fc-9025-2dd86a54f18a" providerId="ADAL" clId="{7B02A175-094B-4BC9-A820-041D15B153AC}" dt="2018-10-12T13:17:31.962" v="128"/>
+        <pc:sldMkLst>
+          <pc:docMk/>
+          <pc:sldMk cId="0" sldId="256"/>
+        </pc:sldMkLst>
+        <pc:spChg chg="mod">
+          <ac:chgData name="WILLIAM RICARDO AGUILAR PIÑA" userId="25538c52-b196-49fc-9025-2dd86a54f18a" providerId="ADAL" clId="{7B02A175-094B-4BC9-A820-041D15B153AC}" dt="2018-10-12T13:08:21.790" v="4" actId="255"/>
+          <ac:spMkLst>
+            <pc:docMk/>
+            <pc:sldMk cId="0" sldId="256"/>
+            <ac:spMk id="8" creationId="{00000000-0000-0000-0000-000000000000}"/>
+          </ac:spMkLst>
+        </pc:spChg>
+        <pc:spChg chg="mod">
+          <ac:chgData name="WILLIAM RICARDO AGUILAR PIÑA" userId="25538c52-b196-49fc-9025-2dd86a54f18a" providerId="ADAL" clId="{7B02A175-094B-4BC9-A820-041D15B153AC}" dt="2018-10-12T13:17:31.962" v="128"/>
+          <ac:spMkLst>
+            <pc:docMk/>
+            <pc:sldMk cId="0" sldId="256"/>
+            <ac:spMk id="9" creationId="{ACC46523-F69E-4664-A425-9648BC1F23B9}"/>
+          </ac:spMkLst>
+        </pc:spChg>
+      </pc:sldChg>
+      <pc:sldChg chg="addSp delSp">
+        <pc:chgData name="WILLIAM RICARDO AGUILAR PIÑA" userId="25538c52-b196-49fc-9025-2dd86a54f18a" providerId="ADAL" clId="{7B02A175-094B-4BC9-A820-041D15B153AC}" dt="2018-10-12T13:18:49.208" v="160"/>
+        <pc:sldMkLst>
+          <pc:docMk/>
+          <pc:sldMk cId="655422725" sldId="298"/>
+        </pc:sldMkLst>
+        <pc:spChg chg="del">
+          <ac:chgData name="WILLIAM RICARDO AGUILAR PIÑA" userId="25538c52-b196-49fc-9025-2dd86a54f18a" providerId="ADAL" clId="{7B02A175-094B-4BC9-A820-041D15B153AC}" dt="2018-10-12T13:18:48.893" v="159" actId="478"/>
+          <ac:spMkLst>
+            <pc:docMk/>
+            <pc:sldMk cId="655422725" sldId="298"/>
+            <ac:spMk id="10" creationId="{D6785755-1437-4D5A-9C94-373277D1F6A1}"/>
+          </ac:spMkLst>
+        </pc:spChg>
+        <pc:spChg chg="add">
+          <ac:chgData name="WILLIAM RICARDO AGUILAR PIÑA" userId="25538c52-b196-49fc-9025-2dd86a54f18a" providerId="ADAL" clId="{7B02A175-094B-4BC9-A820-041D15B153AC}" dt="2018-10-12T13:18:49.208" v="160"/>
+          <ac:spMkLst>
+            <pc:docMk/>
+            <pc:sldMk cId="655422725" sldId="298"/>
+            <ac:spMk id="11" creationId="{70E63F43-478C-4856-B85E-52B2BF27D230}"/>
+          </ac:spMkLst>
+        </pc:spChg>
+      </pc:sldChg>
+    </pc:docChg>
+  </pc:docChgLst>
+  <pc:docChgLst>
+    <pc:chgData name="WILLIAM RICARDO AGUILAR PIÑA" userId="25538c52-b196-49fc-9025-2dd86a54f18a" providerId="ADAL" clId="{DEE8EAB7-5FD5-474F-AAC5-FFF1299E04F4}"/>
+    <pc:docChg chg="modSld">
+      <pc:chgData name="WILLIAM RICARDO AGUILAR PIÑA" userId="25538c52-b196-49fc-9025-2dd86a54f18a" providerId="ADAL" clId="{DEE8EAB7-5FD5-474F-AAC5-FFF1299E04F4}" dt="2023-12-01T12:53:07.457" v="1" actId="20577"/>
+      <pc:docMkLst>
+        <pc:docMk/>
+      </pc:docMkLst>
+      <pc:sldChg chg="modSp mod">
+        <pc:chgData name="WILLIAM RICARDO AGUILAR PIÑA" userId="25538c52-b196-49fc-9025-2dd86a54f18a" providerId="ADAL" clId="{DEE8EAB7-5FD5-474F-AAC5-FFF1299E04F4}" dt="2023-12-01T12:53:07.457" v="1" actId="20577"/>
+        <pc:sldMkLst>
+          <pc:docMk/>
+          <pc:sldMk cId="3053183585" sldId="353"/>
+        </pc:sldMkLst>
+        <pc:spChg chg="mod">
+          <ac:chgData name="WILLIAM RICARDO AGUILAR PIÑA" userId="25538c52-b196-49fc-9025-2dd86a54f18a" providerId="ADAL" clId="{DEE8EAB7-5FD5-474F-AAC5-FFF1299E04F4}" dt="2023-12-01T12:53:07.457" v="1" actId="20577"/>
+          <ac:spMkLst>
+            <pc:docMk/>
+            <pc:sldMk cId="3053183585" sldId="353"/>
+            <ac:spMk id="8" creationId="{00000000-0000-0000-0000-000000000000}"/>
+          </ac:spMkLst>
+        </pc:spChg>
+      </pc:sldChg>
+    </pc:docChg>
+  </pc:docChgLst>
 </pc:chgInfo>
 </file>
 
@@ -1009,7 +1009,7 @@
             <a:fld id="{53CE91DE-ABC6-4D22-89A0-1765B629FB43}" type="datetimeFigureOut">
               <a:rPr lang="es-CO" smtClean="0"/>
               <a:pPr/>
-              <a:t>01/12/2023</a:t>
+              <a:t>21/11/2025</a:t>
             </a:fld>
             <a:endParaRPr lang="es-CO" dirty="0"/>
           </a:p>
@@ -2326,7 +2326,7 @@
             <a:fld id="{43DF08CB-A55A-40B1-AEFD-F19B3CFD19B5}" type="datetimeFigureOut">
               <a:rPr lang="es-CO" smtClean="0"/>
               <a:pPr/>
-              <a:t>01/12/2023</a:t>
+              <a:t>21/11/2025</a:t>
             </a:fld>
             <a:endParaRPr lang="es-CO" dirty="0"/>
           </a:p>
@@ -2493,7 +2493,7 @@
             <a:fld id="{43DF08CB-A55A-40B1-AEFD-F19B3CFD19B5}" type="datetimeFigureOut">
               <a:rPr lang="es-CO" smtClean="0"/>
               <a:pPr/>
-              <a:t>01/12/2023</a:t>
+              <a:t>21/11/2025</a:t>
             </a:fld>
             <a:endParaRPr lang="es-CO" dirty="0"/>
           </a:p>
@@ -2670,7 +2670,7 @@
             <a:fld id="{43DF08CB-A55A-40B1-AEFD-F19B3CFD19B5}" type="datetimeFigureOut">
               <a:rPr lang="es-CO" smtClean="0"/>
               <a:pPr/>
-              <a:t>01/12/2023</a:t>
+              <a:t>21/11/2025</a:t>
             </a:fld>
             <a:endParaRPr lang="es-CO" dirty="0"/>
           </a:p>
@@ -2837,7 +2837,7 @@
             <a:fld id="{43DF08CB-A55A-40B1-AEFD-F19B3CFD19B5}" type="datetimeFigureOut">
               <a:rPr lang="es-CO" smtClean="0"/>
               <a:pPr/>
-              <a:t>01/12/2023</a:t>
+              <a:t>21/11/2025</a:t>
             </a:fld>
             <a:endParaRPr lang="es-CO" dirty="0"/>
           </a:p>
@@ -3080,7 +3080,7 @@
             <a:fld id="{43DF08CB-A55A-40B1-AEFD-F19B3CFD19B5}" type="datetimeFigureOut">
               <a:rPr lang="es-CO" smtClean="0"/>
               <a:pPr/>
-              <a:t>01/12/2023</a:t>
+              <a:t>21/11/2025</a:t>
             </a:fld>
             <a:endParaRPr lang="es-CO" dirty="0"/>
           </a:p>
@@ -3365,7 +3365,7 @@
             <a:fld id="{43DF08CB-A55A-40B1-AEFD-F19B3CFD19B5}" type="datetimeFigureOut">
               <a:rPr lang="es-CO" smtClean="0"/>
               <a:pPr/>
-              <a:t>01/12/2023</a:t>
+              <a:t>21/11/2025</a:t>
             </a:fld>
             <a:endParaRPr lang="es-CO" dirty="0"/>
           </a:p>
@@ -3784,7 +3784,7 @@
             <a:fld id="{43DF08CB-A55A-40B1-AEFD-F19B3CFD19B5}" type="datetimeFigureOut">
               <a:rPr lang="es-CO" smtClean="0"/>
               <a:pPr/>
-              <a:t>01/12/2023</a:t>
+              <a:t>21/11/2025</a:t>
             </a:fld>
             <a:endParaRPr lang="es-CO" dirty="0"/>
           </a:p>
@@ -3899,7 +3899,7 @@
             <a:fld id="{43DF08CB-A55A-40B1-AEFD-F19B3CFD19B5}" type="datetimeFigureOut">
               <a:rPr lang="es-CO" smtClean="0"/>
               <a:pPr/>
-              <a:t>01/12/2023</a:t>
+              <a:t>21/11/2025</a:t>
             </a:fld>
             <a:endParaRPr lang="es-CO" dirty="0"/>
           </a:p>
@@ -3991,7 +3991,7 @@
             <a:fld id="{43DF08CB-A55A-40B1-AEFD-F19B3CFD19B5}" type="datetimeFigureOut">
               <a:rPr lang="es-CO" smtClean="0"/>
               <a:pPr/>
-              <a:t>01/12/2023</a:t>
+              <a:t>21/11/2025</a:t>
             </a:fld>
             <a:endParaRPr lang="es-CO" dirty="0"/>
           </a:p>
@@ -4265,7 +4265,7 @@
             <a:fld id="{43DF08CB-A55A-40B1-AEFD-F19B3CFD19B5}" type="datetimeFigureOut">
               <a:rPr lang="es-CO" smtClean="0"/>
               <a:pPr/>
-              <a:t>01/12/2023</a:t>
+              <a:t>21/11/2025</a:t>
             </a:fld>
             <a:endParaRPr lang="es-CO" dirty="0"/>
           </a:p>
@@ -4515,7 +4515,7 @@
             <a:fld id="{43DF08CB-A55A-40B1-AEFD-F19B3CFD19B5}" type="datetimeFigureOut">
               <a:rPr lang="es-CO" smtClean="0"/>
               <a:pPr/>
-              <a:t>01/12/2023</a:t>
+              <a:t>21/11/2025</a:t>
             </a:fld>
             <a:endParaRPr lang="es-CO" dirty="0"/>
           </a:p>
@@ -4728,7 +4728,7 @@
             <a:fld id="{43DF08CB-A55A-40B1-AEFD-F19B3CFD19B5}" type="datetimeFigureOut">
               <a:rPr lang="es-CO" smtClean="0"/>
               <a:pPr/>
-              <a:t>01/12/2023</a:t>
+              <a:t>21/11/2025</a:t>
             </a:fld>
             <a:endParaRPr lang="es-CO" dirty="0"/>
           </a:p>
